--- a/tests/testdata/excel/PowerPoint/本文以外.pptx
+++ b/tests/testdata/excel/PowerPoint/本文以外.pptx
@@ -116,12 +116,12 @@
 </p188:authorLst>
 </file>
 
-<file path=ppt/comments/modernComment_102_7BF26EB8.xml><?xml version="1.0" encoding="utf-8"?>
+<file path=ppt/comments/modernComment_102_6C60FF06.xml><?xml version="1.0" encoding="utf-8"?>
 <p188:cmLst xmlns:a="http://schemas.openxmlformats.org/drawingml/2006/main" xmlns:r="http://schemas.openxmlformats.org/officeDocument/2006/relationships" xmlns:p188="http://schemas.microsoft.com/office/powerpoint/2018/8/main">
-  <p188:cm id="{1B6CE832-6C81-47CE-82FE-97893BE5BE8B}" authorId="{7C228F90-426C-1A8A-2829-9C63378A780C}" created="2026-09-19T22:36:01.647">
+  <p188:cm id="{4F28713E-D3E8-41B9-9F14-8B0D9706BE93}" authorId="{7C228F90-426C-1A8A-2829-9C63378A780C}" created="2026-09-20T00:30:57.348">
     <pc:sldMkLst xmlns:pc="http://schemas.microsoft.com/office/powerpoint/2013/main/command">
       <pc:docMk/>
-      <pc:sldMk cId="2079485624" sldId="258"/>
+      <pc:sldMk cId="1818296070" sldId="258"/>
     </pc:sldMkLst>
     <p188:pos x="127000" y="127000"/>
     <p188:txBody>
@@ -160,7 +160,7 @@
           <p:cNvPr id="2" name="タイトル 1">
             <a:extLst>
               <a:ext uri="{FF2B5EF4-FFF2-40B4-BE49-F238E27FC236}">
-                <a16:creationId xmlns:a16="http://schemas.microsoft.com/office/drawing/2014/main" id="{1CFB5181-D50F-C803-56BF-50CAC5ECEE2C}"/>
+                <a16:creationId xmlns:a16="http://schemas.microsoft.com/office/drawing/2014/main" id="{0F37C1F2-ABFA-A6B5-7238-5AC33F36A314}"/>
               </a:ext>
             </a:extLst>
           </p:cNvPr>
@@ -197,7 +197,7 @@
           <p:cNvPr id="3" name="字幕 2">
             <a:extLst>
               <a:ext uri="{FF2B5EF4-FFF2-40B4-BE49-F238E27FC236}">
-                <a16:creationId xmlns:a16="http://schemas.microsoft.com/office/drawing/2014/main" id="{3B8714F7-C875-4836-D185-8BA13D4FF6B8}"/>
+                <a16:creationId xmlns:a16="http://schemas.microsoft.com/office/drawing/2014/main" id="{0CC7A9AC-8C1F-84CE-3D3F-129D64979567}"/>
               </a:ext>
             </a:extLst>
           </p:cNvPr>
@@ -267,7 +267,7 @@
           <p:cNvPr id="4" name="日付プレースホルダー 3">
             <a:extLst>
               <a:ext uri="{FF2B5EF4-FFF2-40B4-BE49-F238E27FC236}">
-                <a16:creationId xmlns:a16="http://schemas.microsoft.com/office/drawing/2014/main" id="{8B34F9E8-D381-FDB1-C315-206A42BD4FA4}"/>
+                <a16:creationId xmlns:a16="http://schemas.microsoft.com/office/drawing/2014/main" id="{9A3A03B6-7AC2-85AC-5165-B9D155062BFC}"/>
               </a:ext>
             </a:extLst>
           </p:cNvPr>
@@ -283,7 +283,7 @@
           <a:bodyPr/>
           <a:lstStyle/>
           <a:p>
-            <a:fld id="{38763FD9-025C-42FF-9801-ED3DF9955C4A}" type="datetimeFigureOut">
+            <a:fld id="{A6C33393-DBA6-43C4-B790-5CC6F34FDE5D}" type="datetimeFigureOut">
               <a:rPr kumimoji="1" lang="ja-JP" altLang="en-US" smtClean="0"/>
               <a:t>2026/9/20</a:t>
             </a:fld>
@@ -296,7 +296,7 @@
           <p:cNvPr id="5" name="フッター プレースホルダー 4">
             <a:extLst>
               <a:ext uri="{FF2B5EF4-FFF2-40B4-BE49-F238E27FC236}">
-                <a16:creationId xmlns:a16="http://schemas.microsoft.com/office/drawing/2014/main" id="{76954317-D9EC-8B89-0905-6B8F9AF3F8FB}"/>
+                <a16:creationId xmlns:a16="http://schemas.microsoft.com/office/drawing/2014/main" id="{7521F3C7-FEA3-0549-1FD2-526F442738EA}"/>
               </a:ext>
             </a:extLst>
           </p:cNvPr>
@@ -321,7 +321,7 @@
           <p:cNvPr id="6" name="スライド番号プレースホルダー 5">
             <a:extLst>
               <a:ext uri="{FF2B5EF4-FFF2-40B4-BE49-F238E27FC236}">
-                <a16:creationId xmlns:a16="http://schemas.microsoft.com/office/drawing/2014/main" id="{CFBCC3AC-7BB4-2E7F-FADB-1EE737EFE656}"/>
+                <a16:creationId xmlns:a16="http://schemas.microsoft.com/office/drawing/2014/main" id="{86E4999C-1071-E95C-C520-0A0C52F2E11B}"/>
               </a:ext>
             </a:extLst>
           </p:cNvPr>
@@ -337,7 +337,7 @@
           <a:bodyPr/>
           <a:lstStyle/>
           <a:p>
-            <a:fld id="{58209F0D-5D93-463D-95EF-1CFE68EC00F2}" type="slidenum">
+            <a:fld id="{627C57A2-8EA4-4717-8325-104568F77079}" type="slidenum">
               <a:rPr kumimoji="1" lang="ja-JP" altLang="en-US" smtClean="0"/>
               <a:t>‹#›</a:t>
             </a:fld>
@@ -348,7 +348,7 @@
     </p:spTree>
     <p:extLst>
       <p:ext uri="{BB962C8B-B14F-4D97-AF65-F5344CB8AC3E}">
-        <p14:creationId xmlns:p14="http://schemas.microsoft.com/office/powerpoint/2010/main" val="2698323594"/>
+        <p14:creationId xmlns:p14="http://schemas.microsoft.com/office/powerpoint/2010/main" val="2181197205"/>
       </p:ext>
     </p:extLst>
   </p:cSld>
@@ -380,7 +380,7 @@
           <p:cNvPr id="2" name="タイトル 1">
             <a:extLst>
               <a:ext uri="{FF2B5EF4-FFF2-40B4-BE49-F238E27FC236}">
-                <a16:creationId xmlns:a16="http://schemas.microsoft.com/office/drawing/2014/main" id="{2A050085-4D44-445D-EB83-5E072DF56FCB}"/>
+                <a16:creationId xmlns:a16="http://schemas.microsoft.com/office/drawing/2014/main" id="{61767D40-9395-1F16-925D-F97C218D2A6D}"/>
               </a:ext>
             </a:extLst>
           </p:cNvPr>
@@ -408,7 +408,7 @@
           <p:cNvPr id="3" name="縦書きテキスト プレースホルダー 2">
             <a:extLst>
               <a:ext uri="{FF2B5EF4-FFF2-40B4-BE49-F238E27FC236}">
-                <a16:creationId xmlns:a16="http://schemas.microsoft.com/office/drawing/2014/main" id="{A6E8C219-41F1-CA32-7B2B-B9D9C68C54E6}"/>
+                <a16:creationId xmlns:a16="http://schemas.microsoft.com/office/drawing/2014/main" id="{853A9C99-7E00-3FCF-DEF4-99B6518AB6E2}"/>
               </a:ext>
             </a:extLst>
           </p:cNvPr>
@@ -497,7 +497,7 @@
           <p:cNvPr id="4" name="日付プレースホルダー 3">
             <a:extLst>
               <a:ext uri="{FF2B5EF4-FFF2-40B4-BE49-F238E27FC236}">
-                <a16:creationId xmlns:a16="http://schemas.microsoft.com/office/drawing/2014/main" id="{B9001561-F6D3-7504-B534-9B8BF42849AB}"/>
+                <a16:creationId xmlns:a16="http://schemas.microsoft.com/office/drawing/2014/main" id="{7CF6A1F4-D901-6E74-BC72-5961F66B55A3}"/>
               </a:ext>
             </a:extLst>
           </p:cNvPr>
@@ -513,7 +513,7 @@
           <a:bodyPr/>
           <a:lstStyle/>
           <a:p>
-            <a:fld id="{38763FD9-025C-42FF-9801-ED3DF9955C4A}" type="datetimeFigureOut">
+            <a:fld id="{A6C33393-DBA6-43C4-B790-5CC6F34FDE5D}" type="datetimeFigureOut">
               <a:rPr kumimoji="1" lang="ja-JP" altLang="en-US" smtClean="0"/>
               <a:t>2026/9/20</a:t>
             </a:fld>
@@ -526,7 +526,7 @@
           <p:cNvPr id="5" name="フッター プレースホルダー 4">
             <a:extLst>
               <a:ext uri="{FF2B5EF4-FFF2-40B4-BE49-F238E27FC236}">
-                <a16:creationId xmlns:a16="http://schemas.microsoft.com/office/drawing/2014/main" id="{BF3F6BE3-3C85-DCBB-6E09-5A2B09DC616E}"/>
+                <a16:creationId xmlns:a16="http://schemas.microsoft.com/office/drawing/2014/main" id="{CBE461DF-5D97-7472-1942-AE3D294ADADE}"/>
               </a:ext>
             </a:extLst>
           </p:cNvPr>
@@ -551,7 +551,7 @@
           <p:cNvPr id="6" name="スライド番号プレースホルダー 5">
             <a:extLst>
               <a:ext uri="{FF2B5EF4-FFF2-40B4-BE49-F238E27FC236}">
-                <a16:creationId xmlns:a16="http://schemas.microsoft.com/office/drawing/2014/main" id="{C5E2774F-7150-9C0C-4210-4E554C4DE299}"/>
+                <a16:creationId xmlns:a16="http://schemas.microsoft.com/office/drawing/2014/main" id="{C97C51C0-03DD-C066-6F36-1806D924D49B}"/>
               </a:ext>
             </a:extLst>
           </p:cNvPr>
@@ -567,7 +567,7 @@
           <a:bodyPr/>
           <a:lstStyle/>
           <a:p>
-            <a:fld id="{58209F0D-5D93-463D-95EF-1CFE68EC00F2}" type="slidenum">
+            <a:fld id="{627C57A2-8EA4-4717-8325-104568F77079}" type="slidenum">
               <a:rPr kumimoji="1" lang="ja-JP" altLang="en-US" smtClean="0"/>
               <a:t>‹#›</a:t>
             </a:fld>
@@ -578,7 +578,7 @@
     </p:spTree>
     <p:extLst>
       <p:ext uri="{BB962C8B-B14F-4D97-AF65-F5344CB8AC3E}">
-        <p14:creationId xmlns:p14="http://schemas.microsoft.com/office/powerpoint/2010/main" val="3932709670"/>
+        <p14:creationId xmlns:p14="http://schemas.microsoft.com/office/powerpoint/2010/main" val="4177108522"/>
       </p:ext>
     </p:extLst>
   </p:cSld>
@@ -610,7 +610,7 @@
           <p:cNvPr id="2" name="縦書きタイトル 1">
             <a:extLst>
               <a:ext uri="{FF2B5EF4-FFF2-40B4-BE49-F238E27FC236}">
-                <a16:creationId xmlns:a16="http://schemas.microsoft.com/office/drawing/2014/main" id="{1B774C6F-EB78-1FC5-0607-DEF234CD03A4}"/>
+                <a16:creationId xmlns:a16="http://schemas.microsoft.com/office/drawing/2014/main" id="{7D21A38F-CBF1-7871-24CF-D56FC51EB451}"/>
               </a:ext>
             </a:extLst>
           </p:cNvPr>
@@ -643,7 +643,7 @@
           <p:cNvPr id="3" name="縦書きテキスト プレースホルダー 2">
             <a:extLst>
               <a:ext uri="{FF2B5EF4-FFF2-40B4-BE49-F238E27FC236}">
-                <a16:creationId xmlns:a16="http://schemas.microsoft.com/office/drawing/2014/main" id="{A2005623-C74D-A21C-E5F0-B86465497D01}"/>
+                <a16:creationId xmlns:a16="http://schemas.microsoft.com/office/drawing/2014/main" id="{6E1CD908-8C94-5CE8-0022-07297C908220}"/>
               </a:ext>
             </a:extLst>
           </p:cNvPr>
@@ -737,7 +737,7 @@
           <p:cNvPr id="4" name="日付プレースホルダー 3">
             <a:extLst>
               <a:ext uri="{FF2B5EF4-FFF2-40B4-BE49-F238E27FC236}">
-                <a16:creationId xmlns:a16="http://schemas.microsoft.com/office/drawing/2014/main" id="{0733DF67-45EC-C08C-8A8B-933F7D43CFEF}"/>
+                <a16:creationId xmlns:a16="http://schemas.microsoft.com/office/drawing/2014/main" id="{FD4F36C3-676D-BD3B-09B9-966B7FB1F538}"/>
               </a:ext>
             </a:extLst>
           </p:cNvPr>
@@ -753,7 +753,7 @@
           <a:bodyPr/>
           <a:lstStyle/>
           <a:p>
-            <a:fld id="{38763FD9-025C-42FF-9801-ED3DF9955C4A}" type="datetimeFigureOut">
+            <a:fld id="{A6C33393-DBA6-43C4-B790-5CC6F34FDE5D}" type="datetimeFigureOut">
               <a:rPr kumimoji="1" lang="ja-JP" altLang="en-US" smtClean="0"/>
               <a:t>2026/9/20</a:t>
             </a:fld>
@@ -766,7 +766,7 @@
           <p:cNvPr id="5" name="フッター プレースホルダー 4">
             <a:extLst>
               <a:ext uri="{FF2B5EF4-FFF2-40B4-BE49-F238E27FC236}">
-                <a16:creationId xmlns:a16="http://schemas.microsoft.com/office/drawing/2014/main" id="{0D5424B1-F37E-1562-9A7E-890ACCEF0A7B}"/>
+                <a16:creationId xmlns:a16="http://schemas.microsoft.com/office/drawing/2014/main" id="{33110FB8-002D-FA9A-E514-DB4A58DCA63D}"/>
               </a:ext>
             </a:extLst>
           </p:cNvPr>
@@ -791,7 +791,7 @@
           <p:cNvPr id="6" name="スライド番号プレースホルダー 5">
             <a:extLst>
               <a:ext uri="{FF2B5EF4-FFF2-40B4-BE49-F238E27FC236}">
-                <a16:creationId xmlns:a16="http://schemas.microsoft.com/office/drawing/2014/main" id="{AF4451E9-4679-105E-90AA-063286D7174C}"/>
+                <a16:creationId xmlns:a16="http://schemas.microsoft.com/office/drawing/2014/main" id="{20AC11A1-11B5-9D13-8582-4C1199B3CC1F}"/>
               </a:ext>
             </a:extLst>
           </p:cNvPr>
@@ -807,7 +807,7 @@
           <a:bodyPr/>
           <a:lstStyle/>
           <a:p>
-            <a:fld id="{58209F0D-5D93-463D-95EF-1CFE68EC00F2}" type="slidenum">
+            <a:fld id="{627C57A2-8EA4-4717-8325-104568F77079}" type="slidenum">
               <a:rPr kumimoji="1" lang="ja-JP" altLang="en-US" smtClean="0"/>
               <a:t>‹#›</a:t>
             </a:fld>
@@ -818,7 +818,7 @@
     </p:spTree>
     <p:extLst>
       <p:ext uri="{BB962C8B-B14F-4D97-AF65-F5344CB8AC3E}">
-        <p14:creationId xmlns:p14="http://schemas.microsoft.com/office/powerpoint/2010/main" val="2597948145"/>
+        <p14:creationId xmlns:p14="http://schemas.microsoft.com/office/powerpoint/2010/main" val="1921441231"/>
       </p:ext>
     </p:extLst>
   </p:cSld>
@@ -850,7 +850,7 @@
           <p:cNvPr id="2" name="タイトル 1">
             <a:extLst>
               <a:ext uri="{FF2B5EF4-FFF2-40B4-BE49-F238E27FC236}">
-                <a16:creationId xmlns:a16="http://schemas.microsoft.com/office/drawing/2014/main" id="{D10A8F64-28E9-5C7B-6327-FEAF62E82ED1}"/>
+                <a16:creationId xmlns:a16="http://schemas.microsoft.com/office/drawing/2014/main" id="{5A6DDD08-1E44-2206-C532-4036F1766BD3}"/>
               </a:ext>
             </a:extLst>
           </p:cNvPr>
@@ -878,7 +878,7 @@
           <p:cNvPr id="3" name="テキスト プレースホルダー 2">
             <a:extLst>
               <a:ext uri="{FF2B5EF4-FFF2-40B4-BE49-F238E27FC236}">
-                <a16:creationId xmlns:a16="http://schemas.microsoft.com/office/drawing/2014/main" id="{94585880-D8F9-B1C7-A506-558512161180}"/>
+                <a16:creationId xmlns:a16="http://schemas.microsoft.com/office/drawing/2014/main" id="{3E14402E-05F6-B57A-ACA8-8DBF6C01BA36}"/>
               </a:ext>
             </a:extLst>
           </p:cNvPr>
@@ -967,7 +967,7 @@
           <p:cNvPr id="4" name="日付プレースホルダー 3">
             <a:extLst>
               <a:ext uri="{FF2B5EF4-FFF2-40B4-BE49-F238E27FC236}">
-                <a16:creationId xmlns:a16="http://schemas.microsoft.com/office/drawing/2014/main" id="{EC6F0E58-C9F2-FA4A-6D49-7430774F2064}"/>
+                <a16:creationId xmlns:a16="http://schemas.microsoft.com/office/drawing/2014/main" id="{8C06D3F4-FEC6-B0B2-7F11-0A0F71100ADC}"/>
               </a:ext>
             </a:extLst>
           </p:cNvPr>
@@ -983,7 +983,7 @@
           <a:bodyPr/>
           <a:lstStyle/>
           <a:p>
-            <a:fld id="{38763FD9-025C-42FF-9801-ED3DF9955C4A}" type="datetimeFigureOut">
+            <a:fld id="{A6C33393-DBA6-43C4-B790-5CC6F34FDE5D}" type="datetimeFigureOut">
               <a:rPr kumimoji="1" lang="ja-JP" altLang="en-US" smtClean="0"/>
               <a:t>2026/9/20</a:t>
             </a:fld>
@@ -996,7 +996,7 @@
           <p:cNvPr id="5" name="フッター プレースホルダー 4">
             <a:extLst>
               <a:ext uri="{FF2B5EF4-FFF2-40B4-BE49-F238E27FC236}">
-                <a16:creationId xmlns:a16="http://schemas.microsoft.com/office/drawing/2014/main" id="{D1FDC0ED-BCC9-307C-78D7-73BE78FEA4E7}"/>
+                <a16:creationId xmlns:a16="http://schemas.microsoft.com/office/drawing/2014/main" id="{C50B09D2-CBB7-7C97-CA67-7DD54F196941}"/>
               </a:ext>
             </a:extLst>
           </p:cNvPr>
@@ -1021,7 +1021,7 @@
           <p:cNvPr id="6" name="スライド番号プレースホルダー 5">
             <a:extLst>
               <a:ext uri="{FF2B5EF4-FFF2-40B4-BE49-F238E27FC236}">
-                <a16:creationId xmlns:a16="http://schemas.microsoft.com/office/drawing/2014/main" id="{EC70E68B-DB86-B7C1-DE91-DC1CD3693960}"/>
+                <a16:creationId xmlns:a16="http://schemas.microsoft.com/office/drawing/2014/main" id="{B10B6278-037D-833D-9234-C67D9F2FD028}"/>
               </a:ext>
             </a:extLst>
           </p:cNvPr>
@@ -1037,7 +1037,7 @@
           <a:bodyPr/>
           <a:lstStyle/>
           <a:p>
-            <a:fld id="{58209F0D-5D93-463D-95EF-1CFE68EC00F2}" type="slidenum">
+            <a:fld id="{627C57A2-8EA4-4717-8325-104568F77079}" type="slidenum">
               <a:rPr kumimoji="1" lang="ja-JP" altLang="en-US" smtClean="0"/>
               <a:t>‹#›</a:t>
             </a:fld>
@@ -1048,7 +1048,7 @@
     </p:spTree>
     <p:extLst>
       <p:ext uri="{BB962C8B-B14F-4D97-AF65-F5344CB8AC3E}">
-        <p14:creationId xmlns:p14="http://schemas.microsoft.com/office/powerpoint/2010/main" val="4290047760"/>
+        <p14:creationId xmlns:p14="http://schemas.microsoft.com/office/powerpoint/2010/main" val="4176901709"/>
       </p:ext>
     </p:extLst>
   </p:cSld>
@@ -1080,7 +1080,7 @@
           <p:cNvPr id="2" name="タイトル 1">
             <a:extLst>
               <a:ext uri="{FF2B5EF4-FFF2-40B4-BE49-F238E27FC236}">
-                <a16:creationId xmlns:a16="http://schemas.microsoft.com/office/drawing/2014/main" id="{FE5EF9F4-A5E8-10A9-9AAE-2D79AE93E672}"/>
+                <a16:creationId xmlns:a16="http://schemas.microsoft.com/office/drawing/2014/main" id="{9871C25C-B5F6-821C-F956-65CA19102EF0}"/>
               </a:ext>
             </a:extLst>
           </p:cNvPr>
@@ -1108,7 +1108,7 @@
           <p:cNvPr id="3" name="コンテンツ プレースホルダー 2">
             <a:extLst>
               <a:ext uri="{FF2B5EF4-FFF2-40B4-BE49-F238E27FC236}">
-                <a16:creationId xmlns:a16="http://schemas.microsoft.com/office/drawing/2014/main" id="{97A25F04-1C31-F79D-04FB-498D74B0C1EF}"/>
+                <a16:creationId xmlns:a16="http://schemas.microsoft.com/office/drawing/2014/main" id="{AD43DE0A-F845-7C15-E331-4C0C6E5DB318}"/>
               </a:ext>
             </a:extLst>
           </p:cNvPr>
@@ -1197,7 +1197,7 @@
           <p:cNvPr id="4" name="日付プレースホルダー 3">
             <a:extLst>
               <a:ext uri="{FF2B5EF4-FFF2-40B4-BE49-F238E27FC236}">
-                <a16:creationId xmlns:a16="http://schemas.microsoft.com/office/drawing/2014/main" id="{66E0FDCC-626A-D289-8028-D1464FA9B756}"/>
+                <a16:creationId xmlns:a16="http://schemas.microsoft.com/office/drawing/2014/main" id="{389F3DE4-7F01-A126-2F98-50B4A683F32D}"/>
               </a:ext>
             </a:extLst>
           </p:cNvPr>
@@ -1213,7 +1213,7 @@
           <a:bodyPr/>
           <a:lstStyle/>
           <a:p>
-            <a:fld id="{38763FD9-025C-42FF-9801-ED3DF9955C4A}" type="datetimeFigureOut">
+            <a:fld id="{A6C33393-DBA6-43C4-B790-5CC6F34FDE5D}" type="datetimeFigureOut">
               <a:rPr kumimoji="1" lang="ja-JP" altLang="en-US" smtClean="0"/>
               <a:t>2026/9/20</a:t>
             </a:fld>
@@ -1226,7 +1226,7 @@
           <p:cNvPr id="5" name="フッター プレースホルダー 4">
             <a:extLst>
               <a:ext uri="{FF2B5EF4-FFF2-40B4-BE49-F238E27FC236}">
-                <a16:creationId xmlns:a16="http://schemas.microsoft.com/office/drawing/2014/main" id="{CEC53EC4-70F0-B7F2-06AD-09B7A6869C34}"/>
+                <a16:creationId xmlns:a16="http://schemas.microsoft.com/office/drawing/2014/main" id="{5DB8441E-0614-4E57-A457-586C3795C8F8}"/>
               </a:ext>
             </a:extLst>
           </p:cNvPr>
@@ -1251,7 +1251,7 @@
           <p:cNvPr id="6" name="スライド番号プレースホルダー 5">
             <a:extLst>
               <a:ext uri="{FF2B5EF4-FFF2-40B4-BE49-F238E27FC236}">
-                <a16:creationId xmlns:a16="http://schemas.microsoft.com/office/drawing/2014/main" id="{333F23C9-DE8C-895C-C80B-65051931C4C8}"/>
+                <a16:creationId xmlns:a16="http://schemas.microsoft.com/office/drawing/2014/main" id="{403B9FA2-E56A-4FD2-28BD-25D6F6B912B0}"/>
               </a:ext>
             </a:extLst>
           </p:cNvPr>
@@ -1267,7 +1267,7 @@
           <a:bodyPr/>
           <a:lstStyle/>
           <a:p>
-            <a:fld id="{58209F0D-5D93-463D-95EF-1CFE68EC00F2}" type="slidenum">
+            <a:fld id="{627C57A2-8EA4-4717-8325-104568F77079}" type="slidenum">
               <a:rPr kumimoji="1" lang="ja-JP" altLang="en-US" smtClean="0"/>
               <a:t>‹#›</a:t>
             </a:fld>
@@ -1278,7 +1278,7 @@
     </p:spTree>
     <p:extLst>
       <p:ext uri="{BB962C8B-B14F-4D97-AF65-F5344CB8AC3E}">
-        <p14:creationId xmlns:p14="http://schemas.microsoft.com/office/powerpoint/2010/main" val="927381804"/>
+        <p14:creationId xmlns:p14="http://schemas.microsoft.com/office/powerpoint/2010/main" val="1194592022"/>
       </p:ext>
     </p:extLst>
   </p:cSld>
@@ -1310,7 +1310,7 @@
           <p:cNvPr id="2" name="タイトル 1">
             <a:extLst>
               <a:ext uri="{FF2B5EF4-FFF2-40B4-BE49-F238E27FC236}">
-                <a16:creationId xmlns:a16="http://schemas.microsoft.com/office/drawing/2014/main" id="{9EB06C81-233A-E8F6-F316-152BADD1E152}"/>
+                <a16:creationId xmlns:a16="http://schemas.microsoft.com/office/drawing/2014/main" id="{3E4786A8-4D8F-F057-AE32-C971F8FAC944}"/>
               </a:ext>
             </a:extLst>
           </p:cNvPr>
@@ -1347,7 +1347,7 @@
           <p:cNvPr id="3" name="テキスト プレースホルダー 2">
             <a:extLst>
               <a:ext uri="{FF2B5EF4-FFF2-40B4-BE49-F238E27FC236}">
-                <a16:creationId xmlns:a16="http://schemas.microsoft.com/office/drawing/2014/main" id="{C893F131-881C-4B70-5220-C5911EEE9E31}"/>
+                <a16:creationId xmlns:a16="http://schemas.microsoft.com/office/drawing/2014/main" id="{3E29C68E-B907-0DAC-06CF-929C1563DB4D}"/>
               </a:ext>
             </a:extLst>
           </p:cNvPr>
@@ -1472,7 +1472,7 @@
           <p:cNvPr id="4" name="日付プレースホルダー 3">
             <a:extLst>
               <a:ext uri="{FF2B5EF4-FFF2-40B4-BE49-F238E27FC236}">
-                <a16:creationId xmlns:a16="http://schemas.microsoft.com/office/drawing/2014/main" id="{59F9E963-9B4C-CC9A-85B5-AC5D5BEE6652}"/>
+                <a16:creationId xmlns:a16="http://schemas.microsoft.com/office/drawing/2014/main" id="{B2746899-681A-0B75-4092-441E1ECDFAFA}"/>
               </a:ext>
             </a:extLst>
           </p:cNvPr>
@@ -1488,7 +1488,7 @@
           <a:bodyPr/>
           <a:lstStyle/>
           <a:p>
-            <a:fld id="{38763FD9-025C-42FF-9801-ED3DF9955C4A}" type="datetimeFigureOut">
+            <a:fld id="{A6C33393-DBA6-43C4-B790-5CC6F34FDE5D}" type="datetimeFigureOut">
               <a:rPr kumimoji="1" lang="ja-JP" altLang="en-US" smtClean="0"/>
               <a:t>2026/9/20</a:t>
             </a:fld>
@@ -1501,7 +1501,7 @@
           <p:cNvPr id="5" name="フッター プレースホルダー 4">
             <a:extLst>
               <a:ext uri="{FF2B5EF4-FFF2-40B4-BE49-F238E27FC236}">
-                <a16:creationId xmlns:a16="http://schemas.microsoft.com/office/drawing/2014/main" id="{3D97656B-E1EB-18DB-B536-FE1E934B7D6F}"/>
+                <a16:creationId xmlns:a16="http://schemas.microsoft.com/office/drawing/2014/main" id="{FEEEE5F8-A02A-D9F0-1937-C4BEAB4D7458}"/>
               </a:ext>
             </a:extLst>
           </p:cNvPr>
@@ -1526,7 +1526,7 @@
           <p:cNvPr id="6" name="スライド番号プレースホルダー 5">
             <a:extLst>
               <a:ext uri="{FF2B5EF4-FFF2-40B4-BE49-F238E27FC236}">
-                <a16:creationId xmlns:a16="http://schemas.microsoft.com/office/drawing/2014/main" id="{D294D740-7DDE-86EF-B7A2-5FFA4C127943}"/>
+                <a16:creationId xmlns:a16="http://schemas.microsoft.com/office/drawing/2014/main" id="{AA5CA9EE-27E8-7987-4A8D-6F60DCE9EE6B}"/>
               </a:ext>
             </a:extLst>
           </p:cNvPr>
@@ -1542,7 +1542,7 @@
           <a:bodyPr/>
           <a:lstStyle/>
           <a:p>
-            <a:fld id="{58209F0D-5D93-463D-95EF-1CFE68EC00F2}" type="slidenum">
+            <a:fld id="{627C57A2-8EA4-4717-8325-104568F77079}" type="slidenum">
               <a:rPr kumimoji="1" lang="ja-JP" altLang="en-US" smtClean="0"/>
               <a:t>‹#›</a:t>
             </a:fld>
@@ -1553,7 +1553,7 @@
     </p:spTree>
     <p:extLst>
       <p:ext uri="{BB962C8B-B14F-4D97-AF65-F5344CB8AC3E}">
-        <p14:creationId xmlns:p14="http://schemas.microsoft.com/office/powerpoint/2010/main" val="3923924729"/>
+        <p14:creationId xmlns:p14="http://schemas.microsoft.com/office/powerpoint/2010/main" val="2485240677"/>
       </p:ext>
     </p:extLst>
   </p:cSld>
@@ -1585,7 +1585,7 @@
           <p:cNvPr id="2" name="タイトル 1">
             <a:extLst>
               <a:ext uri="{FF2B5EF4-FFF2-40B4-BE49-F238E27FC236}">
-                <a16:creationId xmlns:a16="http://schemas.microsoft.com/office/drawing/2014/main" id="{F82775CF-8728-BB1D-0AE9-79B56D690CB3}"/>
+                <a16:creationId xmlns:a16="http://schemas.microsoft.com/office/drawing/2014/main" id="{D98526A4-F2D1-AE8B-6510-D7671E68350F}"/>
               </a:ext>
             </a:extLst>
           </p:cNvPr>
@@ -1613,7 +1613,7 @@
           <p:cNvPr id="3" name="コンテンツ プレースホルダー 2">
             <a:extLst>
               <a:ext uri="{FF2B5EF4-FFF2-40B4-BE49-F238E27FC236}">
-                <a16:creationId xmlns:a16="http://schemas.microsoft.com/office/drawing/2014/main" id="{411F5CC7-4C97-22F5-F594-6742D0FA8235}"/>
+                <a16:creationId xmlns:a16="http://schemas.microsoft.com/office/drawing/2014/main" id="{BEA1234F-570B-077F-1567-3CB1D3250984}"/>
               </a:ext>
             </a:extLst>
           </p:cNvPr>
@@ -1707,7 +1707,7 @@
           <p:cNvPr id="4" name="コンテンツ プレースホルダー 3">
             <a:extLst>
               <a:ext uri="{FF2B5EF4-FFF2-40B4-BE49-F238E27FC236}">
-                <a16:creationId xmlns:a16="http://schemas.microsoft.com/office/drawing/2014/main" id="{D0E89AB2-E5AF-AA19-1F8A-E212256C66CD}"/>
+                <a16:creationId xmlns:a16="http://schemas.microsoft.com/office/drawing/2014/main" id="{854567B1-7360-883B-F969-54CEEB9210A4}"/>
               </a:ext>
             </a:extLst>
           </p:cNvPr>
@@ -1801,7 +1801,7 @@
           <p:cNvPr id="5" name="日付プレースホルダー 4">
             <a:extLst>
               <a:ext uri="{FF2B5EF4-FFF2-40B4-BE49-F238E27FC236}">
-                <a16:creationId xmlns:a16="http://schemas.microsoft.com/office/drawing/2014/main" id="{87E738B3-9BE3-0B7A-B5FE-6BD76EA7A6A7}"/>
+                <a16:creationId xmlns:a16="http://schemas.microsoft.com/office/drawing/2014/main" id="{45A0B99D-0659-3C52-9AA5-FD6F03A45C53}"/>
               </a:ext>
             </a:extLst>
           </p:cNvPr>
@@ -1817,7 +1817,7 @@
           <a:bodyPr/>
           <a:lstStyle/>
           <a:p>
-            <a:fld id="{38763FD9-025C-42FF-9801-ED3DF9955C4A}" type="datetimeFigureOut">
+            <a:fld id="{A6C33393-DBA6-43C4-B790-5CC6F34FDE5D}" type="datetimeFigureOut">
               <a:rPr kumimoji="1" lang="ja-JP" altLang="en-US" smtClean="0"/>
               <a:t>2026/9/20</a:t>
             </a:fld>
@@ -1830,7 +1830,7 @@
           <p:cNvPr id="6" name="フッター プレースホルダー 5">
             <a:extLst>
               <a:ext uri="{FF2B5EF4-FFF2-40B4-BE49-F238E27FC236}">
-                <a16:creationId xmlns:a16="http://schemas.microsoft.com/office/drawing/2014/main" id="{E9D0C6DA-3969-52CF-3739-D77EBDFA90EA}"/>
+                <a16:creationId xmlns:a16="http://schemas.microsoft.com/office/drawing/2014/main" id="{70823F4F-EF5E-9F19-0A41-72B4CABC769A}"/>
               </a:ext>
             </a:extLst>
           </p:cNvPr>
@@ -1855,7 +1855,7 @@
           <p:cNvPr id="7" name="スライド番号プレースホルダー 6">
             <a:extLst>
               <a:ext uri="{FF2B5EF4-FFF2-40B4-BE49-F238E27FC236}">
-                <a16:creationId xmlns:a16="http://schemas.microsoft.com/office/drawing/2014/main" id="{C80CB313-FDE5-DC0C-406B-123998255098}"/>
+                <a16:creationId xmlns:a16="http://schemas.microsoft.com/office/drawing/2014/main" id="{4924F8FF-8FFD-8852-286A-13E978644526}"/>
               </a:ext>
             </a:extLst>
           </p:cNvPr>
@@ -1871,7 +1871,7 @@
           <a:bodyPr/>
           <a:lstStyle/>
           <a:p>
-            <a:fld id="{58209F0D-5D93-463D-95EF-1CFE68EC00F2}" type="slidenum">
+            <a:fld id="{627C57A2-8EA4-4717-8325-104568F77079}" type="slidenum">
               <a:rPr kumimoji="1" lang="ja-JP" altLang="en-US" smtClean="0"/>
               <a:t>‹#›</a:t>
             </a:fld>
@@ -1882,7 +1882,7 @@
     </p:spTree>
     <p:extLst>
       <p:ext uri="{BB962C8B-B14F-4D97-AF65-F5344CB8AC3E}">
-        <p14:creationId xmlns:p14="http://schemas.microsoft.com/office/powerpoint/2010/main" val="1944345201"/>
+        <p14:creationId xmlns:p14="http://schemas.microsoft.com/office/powerpoint/2010/main" val="3572826484"/>
       </p:ext>
     </p:extLst>
   </p:cSld>
@@ -1914,7 +1914,7 @@
           <p:cNvPr id="2" name="タイトル 1">
             <a:extLst>
               <a:ext uri="{FF2B5EF4-FFF2-40B4-BE49-F238E27FC236}">
-                <a16:creationId xmlns:a16="http://schemas.microsoft.com/office/drawing/2014/main" id="{669A00A4-5534-BAE5-D8BB-F1830FC5E79C}"/>
+                <a16:creationId xmlns:a16="http://schemas.microsoft.com/office/drawing/2014/main" id="{680AF535-6DA1-45E9-DA05-E118ECF054FB}"/>
               </a:ext>
             </a:extLst>
           </p:cNvPr>
@@ -1947,7 +1947,7 @@
           <p:cNvPr id="3" name="テキスト プレースホルダー 2">
             <a:extLst>
               <a:ext uri="{FF2B5EF4-FFF2-40B4-BE49-F238E27FC236}">
-                <a16:creationId xmlns:a16="http://schemas.microsoft.com/office/drawing/2014/main" id="{57391B2B-D682-5C79-9657-1B43818A6C38}"/>
+                <a16:creationId xmlns:a16="http://schemas.microsoft.com/office/drawing/2014/main" id="{E7E656B9-791B-1EDE-A6E8-2BBD5200CD4A}"/>
               </a:ext>
             </a:extLst>
           </p:cNvPr>
@@ -2018,7 +2018,7 @@
           <p:cNvPr id="4" name="コンテンツ プレースホルダー 3">
             <a:extLst>
               <a:ext uri="{FF2B5EF4-FFF2-40B4-BE49-F238E27FC236}">
-                <a16:creationId xmlns:a16="http://schemas.microsoft.com/office/drawing/2014/main" id="{F918D106-5648-CD43-5F6F-3C099CA3BEC8}"/>
+                <a16:creationId xmlns:a16="http://schemas.microsoft.com/office/drawing/2014/main" id="{063AC961-2B88-F193-06D4-7FB128DE6B22}"/>
               </a:ext>
             </a:extLst>
           </p:cNvPr>
@@ -2112,7 +2112,7 @@
           <p:cNvPr id="5" name="テキスト プレースホルダー 4">
             <a:extLst>
               <a:ext uri="{FF2B5EF4-FFF2-40B4-BE49-F238E27FC236}">
-                <a16:creationId xmlns:a16="http://schemas.microsoft.com/office/drawing/2014/main" id="{4D3795B3-8000-A8D8-B658-2589B46C7C7D}"/>
+                <a16:creationId xmlns:a16="http://schemas.microsoft.com/office/drawing/2014/main" id="{5CB8AAD3-D6E2-6DA5-C9D7-B21A355A8353}"/>
               </a:ext>
             </a:extLst>
           </p:cNvPr>
@@ -2183,7 +2183,7 @@
           <p:cNvPr id="6" name="コンテンツ プレースホルダー 5">
             <a:extLst>
               <a:ext uri="{FF2B5EF4-FFF2-40B4-BE49-F238E27FC236}">
-                <a16:creationId xmlns:a16="http://schemas.microsoft.com/office/drawing/2014/main" id="{80390B9A-0E88-4FC3-FDC2-94A36C83B627}"/>
+                <a16:creationId xmlns:a16="http://schemas.microsoft.com/office/drawing/2014/main" id="{DD55B6A8-6EB1-97DA-3581-467CB1F05A42}"/>
               </a:ext>
             </a:extLst>
           </p:cNvPr>
@@ -2277,7 +2277,7 @@
           <p:cNvPr id="7" name="日付プレースホルダー 6">
             <a:extLst>
               <a:ext uri="{FF2B5EF4-FFF2-40B4-BE49-F238E27FC236}">
-                <a16:creationId xmlns:a16="http://schemas.microsoft.com/office/drawing/2014/main" id="{FF61784B-DEAA-1421-7AC3-41D7A61F827F}"/>
+                <a16:creationId xmlns:a16="http://schemas.microsoft.com/office/drawing/2014/main" id="{33C5F686-5D31-5745-AA7B-DD0FEFE59882}"/>
               </a:ext>
             </a:extLst>
           </p:cNvPr>
@@ -2293,7 +2293,7 @@
           <a:bodyPr/>
           <a:lstStyle/>
           <a:p>
-            <a:fld id="{38763FD9-025C-42FF-9801-ED3DF9955C4A}" type="datetimeFigureOut">
+            <a:fld id="{A6C33393-DBA6-43C4-B790-5CC6F34FDE5D}" type="datetimeFigureOut">
               <a:rPr kumimoji="1" lang="ja-JP" altLang="en-US" smtClean="0"/>
               <a:t>2026/9/20</a:t>
             </a:fld>
@@ -2306,7 +2306,7 @@
           <p:cNvPr id="8" name="フッター プレースホルダー 7">
             <a:extLst>
               <a:ext uri="{FF2B5EF4-FFF2-40B4-BE49-F238E27FC236}">
-                <a16:creationId xmlns:a16="http://schemas.microsoft.com/office/drawing/2014/main" id="{DA47876F-3B3C-2EFC-B8B7-B306331ADD8D}"/>
+                <a16:creationId xmlns:a16="http://schemas.microsoft.com/office/drawing/2014/main" id="{FFB3B101-77AF-575A-584F-F4A051DA9C8F}"/>
               </a:ext>
             </a:extLst>
           </p:cNvPr>
@@ -2331,7 +2331,7 @@
           <p:cNvPr id="9" name="スライド番号プレースホルダー 8">
             <a:extLst>
               <a:ext uri="{FF2B5EF4-FFF2-40B4-BE49-F238E27FC236}">
-                <a16:creationId xmlns:a16="http://schemas.microsoft.com/office/drawing/2014/main" id="{BDD9F2FA-1E41-7764-A4EB-B7B65B25C5BB}"/>
+                <a16:creationId xmlns:a16="http://schemas.microsoft.com/office/drawing/2014/main" id="{78009398-B8F6-F37F-A017-2EAA214FF043}"/>
               </a:ext>
             </a:extLst>
           </p:cNvPr>
@@ -2347,7 +2347,7 @@
           <a:bodyPr/>
           <a:lstStyle/>
           <a:p>
-            <a:fld id="{58209F0D-5D93-463D-95EF-1CFE68EC00F2}" type="slidenum">
+            <a:fld id="{627C57A2-8EA4-4717-8325-104568F77079}" type="slidenum">
               <a:rPr kumimoji="1" lang="ja-JP" altLang="en-US" smtClean="0"/>
               <a:t>‹#›</a:t>
             </a:fld>
@@ -2358,7 +2358,7 @@
     </p:spTree>
     <p:extLst>
       <p:ext uri="{BB962C8B-B14F-4D97-AF65-F5344CB8AC3E}">
-        <p14:creationId xmlns:p14="http://schemas.microsoft.com/office/powerpoint/2010/main" val="2409339140"/>
+        <p14:creationId xmlns:p14="http://schemas.microsoft.com/office/powerpoint/2010/main" val="2843598823"/>
       </p:ext>
     </p:extLst>
   </p:cSld>
@@ -2390,7 +2390,7 @@
           <p:cNvPr id="2" name="タイトル 1">
             <a:extLst>
               <a:ext uri="{FF2B5EF4-FFF2-40B4-BE49-F238E27FC236}">
-                <a16:creationId xmlns:a16="http://schemas.microsoft.com/office/drawing/2014/main" id="{92BF1CD9-982D-558F-8C1B-CC2BA0E69B97}"/>
+                <a16:creationId xmlns:a16="http://schemas.microsoft.com/office/drawing/2014/main" id="{5D9DC65F-A45C-6902-5F76-838659CDB88A}"/>
               </a:ext>
             </a:extLst>
           </p:cNvPr>
@@ -2418,7 +2418,7 @@
           <p:cNvPr id="3" name="日付プレースホルダー 2">
             <a:extLst>
               <a:ext uri="{FF2B5EF4-FFF2-40B4-BE49-F238E27FC236}">
-                <a16:creationId xmlns:a16="http://schemas.microsoft.com/office/drawing/2014/main" id="{6CD2866D-F350-5A55-D8F7-D1B0BDBCE360}"/>
+                <a16:creationId xmlns:a16="http://schemas.microsoft.com/office/drawing/2014/main" id="{7103951D-E12D-657A-E1C4-8FA5ABBD1D7D}"/>
               </a:ext>
             </a:extLst>
           </p:cNvPr>
@@ -2434,7 +2434,7 @@
           <a:bodyPr/>
           <a:lstStyle/>
           <a:p>
-            <a:fld id="{38763FD9-025C-42FF-9801-ED3DF9955C4A}" type="datetimeFigureOut">
+            <a:fld id="{A6C33393-DBA6-43C4-B790-5CC6F34FDE5D}" type="datetimeFigureOut">
               <a:rPr kumimoji="1" lang="ja-JP" altLang="en-US" smtClean="0"/>
               <a:t>2026/9/20</a:t>
             </a:fld>
@@ -2447,7 +2447,7 @@
           <p:cNvPr id="4" name="フッター プレースホルダー 3">
             <a:extLst>
               <a:ext uri="{FF2B5EF4-FFF2-40B4-BE49-F238E27FC236}">
-                <a16:creationId xmlns:a16="http://schemas.microsoft.com/office/drawing/2014/main" id="{20B0AA8D-25CD-0B67-4356-C96FDCBE84BA}"/>
+                <a16:creationId xmlns:a16="http://schemas.microsoft.com/office/drawing/2014/main" id="{1CFA23AC-09A5-206F-50B4-26A5188C4F87}"/>
               </a:ext>
             </a:extLst>
           </p:cNvPr>
@@ -2472,7 +2472,7 @@
           <p:cNvPr id="5" name="スライド番号プレースホルダー 4">
             <a:extLst>
               <a:ext uri="{FF2B5EF4-FFF2-40B4-BE49-F238E27FC236}">
-                <a16:creationId xmlns:a16="http://schemas.microsoft.com/office/drawing/2014/main" id="{024811F9-B99D-F156-F58D-60E4020AA969}"/>
+                <a16:creationId xmlns:a16="http://schemas.microsoft.com/office/drawing/2014/main" id="{47C244C8-3C13-9468-7CC0-0D46DAC4DF28}"/>
               </a:ext>
             </a:extLst>
           </p:cNvPr>
@@ -2488,7 +2488,7 @@
           <a:bodyPr/>
           <a:lstStyle/>
           <a:p>
-            <a:fld id="{58209F0D-5D93-463D-95EF-1CFE68EC00F2}" type="slidenum">
+            <a:fld id="{627C57A2-8EA4-4717-8325-104568F77079}" type="slidenum">
               <a:rPr kumimoji="1" lang="ja-JP" altLang="en-US" smtClean="0"/>
               <a:t>‹#›</a:t>
             </a:fld>
@@ -2499,7 +2499,7 @@
     </p:spTree>
     <p:extLst>
       <p:ext uri="{BB962C8B-B14F-4D97-AF65-F5344CB8AC3E}">
-        <p14:creationId xmlns:p14="http://schemas.microsoft.com/office/powerpoint/2010/main" val="2067739555"/>
+        <p14:creationId xmlns:p14="http://schemas.microsoft.com/office/powerpoint/2010/main" val="4184396353"/>
       </p:ext>
     </p:extLst>
   </p:cSld>
@@ -2531,7 +2531,7 @@
           <p:cNvPr id="2" name="日付プレースホルダー 1">
             <a:extLst>
               <a:ext uri="{FF2B5EF4-FFF2-40B4-BE49-F238E27FC236}">
-                <a16:creationId xmlns:a16="http://schemas.microsoft.com/office/drawing/2014/main" id="{61882AE8-C98B-FA61-D37B-EAE39E8579F1}"/>
+                <a16:creationId xmlns:a16="http://schemas.microsoft.com/office/drawing/2014/main" id="{C417AF7F-83F6-3C41-FD3D-69AC961534E3}"/>
               </a:ext>
             </a:extLst>
           </p:cNvPr>
@@ -2547,7 +2547,7 @@
           <a:bodyPr/>
           <a:lstStyle/>
           <a:p>
-            <a:fld id="{38763FD9-025C-42FF-9801-ED3DF9955C4A}" type="datetimeFigureOut">
+            <a:fld id="{A6C33393-DBA6-43C4-B790-5CC6F34FDE5D}" type="datetimeFigureOut">
               <a:rPr kumimoji="1" lang="ja-JP" altLang="en-US" smtClean="0"/>
               <a:t>2026/9/20</a:t>
             </a:fld>
@@ -2560,7 +2560,7 @@
           <p:cNvPr id="3" name="フッター プレースホルダー 2">
             <a:extLst>
               <a:ext uri="{FF2B5EF4-FFF2-40B4-BE49-F238E27FC236}">
-                <a16:creationId xmlns:a16="http://schemas.microsoft.com/office/drawing/2014/main" id="{6AC34EC2-4142-3A0C-4CEF-CBE792A12406}"/>
+                <a16:creationId xmlns:a16="http://schemas.microsoft.com/office/drawing/2014/main" id="{220D880A-52CF-4ADA-D32E-E480CA1107BB}"/>
               </a:ext>
             </a:extLst>
           </p:cNvPr>
@@ -2585,7 +2585,7 @@
           <p:cNvPr id="4" name="スライド番号プレースホルダー 3">
             <a:extLst>
               <a:ext uri="{FF2B5EF4-FFF2-40B4-BE49-F238E27FC236}">
-                <a16:creationId xmlns:a16="http://schemas.microsoft.com/office/drawing/2014/main" id="{6301216A-BA18-FCB0-C136-12447C042847}"/>
+                <a16:creationId xmlns:a16="http://schemas.microsoft.com/office/drawing/2014/main" id="{FB440357-9A12-290A-9C1C-CA195FF18CFF}"/>
               </a:ext>
             </a:extLst>
           </p:cNvPr>
@@ -2601,7 +2601,7 @@
           <a:bodyPr/>
           <a:lstStyle/>
           <a:p>
-            <a:fld id="{58209F0D-5D93-463D-95EF-1CFE68EC00F2}" type="slidenum">
+            <a:fld id="{627C57A2-8EA4-4717-8325-104568F77079}" type="slidenum">
               <a:rPr kumimoji="1" lang="ja-JP" altLang="en-US" smtClean="0"/>
               <a:t>‹#›</a:t>
             </a:fld>
@@ -2612,7 +2612,7 @@
     </p:spTree>
     <p:extLst>
       <p:ext uri="{BB962C8B-B14F-4D97-AF65-F5344CB8AC3E}">
-        <p14:creationId xmlns:p14="http://schemas.microsoft.com/office/powerpoint/2010/main" val="2522273488"/>
+        <p14:creationId xmlns:p14="http://schemas.microsoft.com/office/powerpoint/2010/main" val="4098350079"/>
       </p:ext>
     </p:extLst>
   </p:cSld>
@@ -2644,7 +2644,7 @@
           <p:cNvPr id="2" name="タイトル 1">
             <a:extLst>
               <a:ext uri="{FF2B5EF4-FFF2-40B4-BE49-F238E27FC236}">
-                <a16:creationId xmlns:a16="http://schemas.microsoft.com/office/drawing/2014/main" id="{F3599234-4076-4608-7B7C-31EA3CC2F51C}"/>
+                <a16:creationId xmlns:a16="http://schemas.microsoft.com/office/drawing/2014/main" id="{CAF7CD96-8A47-C7F6-41E9-FF0621E99826}"/>
               </a:ext>
             </a:extLst>
           </p:cNvPr>
@@ -2681,7 +2681,7 @@
           <p:cNvPr id="3" name="コンテンツ プレースホルダー 2">
             <a:extLst>
               <a:ext uri="{FF2B5EF4-FFF2-40B4-BE49-F238E27FC236}">
-                <a16:creationId xmlns:a16="http://schemas.microsoft.com/office/drawing/2014/main" id="{DBEB2BEF-C6D1-1121-0794-7334E27F0E3D}"/>
+                <a16:creationId xmlns:a16="http://schemas.microsoft.com/office/drawing/2014/main" id="{7BE74968-D86A-69D4-B0F6-83D42FF4BF99}"/>
               </a:ext>
             </a:extLst>
           </p:cNvPr>
@@ -2803,7 +2803,7 @@
           <p:cNvPr id="4" name="テキスト プレースホルダー 3">
             <a:extLst>
               <a:ext uri="{FF2B5EF4-FFF2-40B4-BE49-F238E27FC236}">
-                <a16:creationId xmlns:a16="http://schemas.microsoft.com/office/drawing/2014/main" id="{B05471D4-E885-6CD3-3C39-7B1AADE25BB0}"/>
+                <a16:creationId xmlns:a16="http://schemas.microsoft.com/office/drawing/2014/main" id="{81B957EB-2FEA-9201-C459-7B6E3425318B}"/>
               </a:ext>
             </a:extLst>
           </p:cNvPr>
@@ -2874,7 +2874,7 @@
           <p:cNvPr id="5" name="日付プレースホルダー 4">
             <a:extLst>
               <a:ext uri="{FF2B5EF4-FFF2-40B4-BE49-F238E27FC236}">
-                <a16:creationId xmlns:a16="http://schemas.microsoft.com/office/drawing/2014/main" id="{00C80CFA-7F1B-5189-13E5-A38F910F29D4}"/>
+                <a16:creationId xmlns:a16="http://schemas.microsoft.com/office/drawing/2014/main" id="{0F2F5652-FC6A-AF43-EB98-BEE400340408}"/>
               </a:ext>
             </a:extLst>
           </p:cNvPr>
@@ -2890,7 +2890,7 @@
           <a:bodyPr/>
           <a:lstStyle/>
           <a:p>
-            <a:fld id="{38763FD9-025C-42FF-9801-ED3DF9955C4A}" type="datetimeFigureOut">
+            <a:fld id="{A6C33393-DBA6-43C4-B790-5CC6F34FDE5D}" type="datetimeFigureOut">
               <a:rPr kumimoji="1" lang="ja-JP" altLang="en-US" smtClean="0"/>
               <a:t>2026/9/20</a:t>
             </a:fld>
@@ -2903,7 +2903,7 @@
           <p:cNvPr id="6" name="フッター プレースホルダー 5">
             <a:extLst>
               <a:ext uri="{FF2B5EF4-FFF2-40B4-BE49-F238E27FC236}">
-                <a16:creationId xmlns:a16="http://schemas.microsoft.com/office/drawing/2014/main" id="{B2106C3A-3655-DF49-0551-6BCC93116D01}"/>
+                <a16:creationId xmlns:a16="http://schemas.microsoft.com/office/drawing/2014/main" id="{AA6CC3ED-6945-BECD-1860-56E52534DF5C}"/>
               </a:ext>
             </a:extLst>
           </p:cNvPr>
@@ -2928,7 +2928,7 @@
           <p:cNvPr id="7" name="スライド番号プレースホルダー 6">
             <a:extLst>
               <a:ext uri="{FF2B5EF4-FFF2-40B4-BE49-F238E27FC236}">
-                <a16:creationId xmlns:a16="http://schemas.microsoft.com/office/drawing/2014/main" id="{C302776B-4ED5-F384-5C9F-833DC9A3D33C}"/>
+                <a16:creationId xmlns:a16="http://schemas.microsoft.com/office/drawing/2014/main" id="{0FCE46FC-7AF7-4716-9FA5-1E851E261F39}"/>
               </a:ext>
             </a:extLst>
           </p:cNvPr>
@@ -2944,7 +2944,7 @@
           <a:bodyPr/>
           <a:lstStyle/>
           <a:p>
-            <a:fld id="{58209F0D-5D93-463D-95EF-1CFE68EC00F2}" type="slidenum">
+            <a:fld id="{627C57A2-8EA4-4717-8325-104568F77079}" type="slidenum">
               <a:rPr kumimoji="1" lang="ja-JP" altLang="en-US" smtClean="0"/>
               <a:t>‹#›</a:t>
             </a:fld>
@@ -2955,7 +2955,7 @@
     </p:spTree>
     <p:extLst>
       <p:ext uri="{BB962C8B-B14F-4D97-AF65-F5344CB8AC3E}">
-        <p14:creationId xmlns:p14="http://schemas.microsoft.com/office/powerpoint/2010/main" val="1851318816"/>
+        <p14:creationId xmlns:p14="http://schemas.microsoft.com/office/powerpoint/2010/main" val="1971886798"/>
       </p:ext>
     </p:extLst>
   </p:cSld>
@@ -2987,7 +2987,7 @@
           <p:cNvPr id="2" name="タイトル 1">
             <a:extLst>
               <a:ext uri="{FF2B5EF4-FFF2-40B4-BE49-F238E27FC236}">
-                <a16:creationId xmlns:a16="http://schemas.microsoft.com/office/drawing/2014/main" id="{CE7E4E99-9553-37F6-C76C-625946BA2EED}"/>
+                <a16:creationId xmlns:a16="http://schemas.microsoft.com/office/drawing/2014/main" id="{E2264A6B-D417-BD05-F821-8CBFFD0B0565}"/>
               </a:ext>
             </a:extLst>
           </p:cNvPr>
@@ -3024,7 +3024,7 @@
           <p:cNvPr id="3" name="図プレースホルダー 2">
             <a:extLst>
               <a:ext uri="{FF2B5EF4-FFF2-40B4-BE49-F238E27FC236}">
-                <a16:creationId xmlns:a16="http://schemas.microsoft.com/office/drawing/2014/main" id="{A6708974-5FCD-FDC4-1883-B418A8774A5D}"/>
+                <a16:creationId xmlns:a16="http://schemas.microsoft.com/office/drawing/2014/main" id="{A3E27F17-FEFF-5C0A-2AD2-5BA9B13C8A0D}"/>
               </a:ext>
             </a:extLst>
           </p:cNvPr>
@@ -3091,7 +3091,7 @@
           <p:cNvPr id="4" name="テキスト プレースホルダー 3">
             <a:extLst>
               <a:ext uri="{FF2B5EF4-FFF2-40B4-BE49-F238E27FC236}">
-                <a16:creationId xmlns:a16="http://schemas.microsoft.com/office/drawing/2014/main" id="{30411782-3EDD-F68C-5BEE-67508FFAA2B0}"/>
+                <a16:creationId xmlns:a16="http://schemas.microsoft.com/office/drawing/2014/main" id="{7E4438DC-A7F5-3034-393E-A205C654023A}"/>
               </a:ext>
             </a:extLst>
           </p:cNvPr>
@@ -3162,7 +3162,7 @@
           <p:cNvPr id="5" name="日付プレースホルダー 4">
             <a:extLst>
               <a:ext uri="{FF2B5EF4-FFF2-40B4-BE49-F238E27FC236}">
-                <a16:creationId xmlns:a16="http://schemas.microsoft.com/office/drawing/2014/main" id="{DE1F9563-EADC-B9F6-ECB2-FCA7BC84749B}"/>
+                <a16:creationId xmlns:a16="http://schemas.microsoft.com/office/drawing/2014/main" id="{9505F50D-4355-8CA7-F4E2-B298A134689B}"/>
               </a:ext>
             </a:extLst>
           </p:cNvPr>
@@ -3178,7 +3178,7 @@
           <a:bodyPr/>
           <a:lstStyle/>
           <a:p>
-            <a:fld id="{38763FD9-025C-42FF-9801-ED3DF9955C4A}" type="datetimeFigureOut">
+            <a:fld id="{A6C33393-DBA6-43C4-B790-5CC6F34FDE5D}" type="datetimeFigureOut">
               <a:rPr kumimoji="1" lang="ja-JP" altLang="en-US" smtClean="0"/>
               <a:t>2026/9/20</a:t>
             </a:fld>
@@ -3191,7 +3191,7 @@
           <p:cNvPr id="6" name="フッター プレースホルダー 5">
             <a:extLst>
               <a:ext uri="{FF2B5EF4-FFF2-40B4-BE49-F238E27FC236}">
-                <a16:creationId xmlns:a16="http://schemas.microsoft.com/office/drawing/2014/main" id="{89373030-7F66-236D-9230-0D00D336474E}"/>
+                <a16:creationId xmlns:a16="http://schemas.microsoft.com/office/drawing/2014/main" id="{C7DAC78B-69F8-39FE-DFC1-724C29E29B79}"/>
               </a:ext>
             </a:extLst>
           </p:cNvPr>
@@ -3216,7 +3216,7 @@
           <p:cNvPr id="7" name="スライド番号プレースホルダー 6">
             <a:extLst>
               <a:ext uri="{FF2B5EF4-FFF2-40B4-BE49-F238E27FC236}">
-                <a16:creationId xmlns:a16="http://schemas.microsoft.com/office/drawing/2014/main" id="{DFF26DC5-95AE-D255-99F4-7DE95171E0B1}"/>
+                <a16:creationId xmlns:a16="http://schemas.microsoft.com/office/drawing/2014/main" id="{8BA61300-8282-8573-78BD-C4EC778A2C0B}"/>
               </a:ext>
             </a:extLst>
           </p:cNvPr>
@@ -3232,7 +3232,7 @@
           <a:bodyPr/>
           <a:lstStyle/>
           <a:p>
-            <a:fld id="{58209F0D-5D93-463D-95EF-1CFE68EC00F2}" type="slidenum">
+            <a:fld id="{627C57A2-8EA4-4717-8325-104568F77079}" type="slidenum">
               <a:rPr kumimoji="1" lang="ja-JP" altLang="en-US" smtClean="0"/>
               <a:t>‹#›</a:t>
             </a:fld>
@@ -3243,7 +3243,7 @@
     </p:spTree>
     <p:extLst>
       <p:ext uri="{BB962C8B-B14F-4D97-AF65-F5344CB8AC3E}">
-        <p14:creationId xmlns:p14="http://schemas.microsoft.com/office/powerpoint/2010/main" val="131317602"/>
+        <p14:creationId xmlns:p14="http://schemas.microsoft.com/office/powerpoint/2010/main" val="1376692891"/>
       </p:ext>
     </p:extLst>
   </p:cSld>
@@ -3280,7 +3280,7 @@
           <p:cNvPr id="2" name="タイトル プレースホルダー 1">
             <a:extLst>
               <a:ext uri="{FF2B5EF4-FFF2-40B4-BE49-F238E27FC236}">
-                <a16:creationId xmlns:a16="http://schemas.microsoft.com/office/drawing/2014/main" id="{9AC43244-BB36-EA3D-19C9-43EB1828E488}"/>
+                <a16:creationId xmlns:a16="http://schemas.microsoft.com/office/drawing/2014/main" id="{8F0C01CC-9FDD-0BB6-50AA-348BFB26D04F}"/>
               </a:ext>
             </a:extLst>
           </p:cNvPr>
@@ -3318,7 +3318,7 @@
           <p:cNvPr id="3" name="テキスト プレースホルダー 2">
             <a:extLst>
               <a:ext uri="{FF2B5EF4-FFF2-40B4-BE49-F238E27FC236}">
-                <a16:creationId xmlns:a16="http://schemas.microsoft.com/office/drawing/2014/main" id="{6E443E3D-C77B-ADE1-7F79-BC420C379B25}"/>
+                <a16:creationId xmlns:a16="http://schemas.microsoft.com/office/drawing/2014/main" id="{3782A3D3-EBDB-7E82-312D-4E6C8026DA67}"/>
               </a:ext>
             </a:extLst>
           </p:cNvPr>
@@ -3417,7 +3417,7 @@
           <p:cNvPr id="4" name="日付プレースホルダー 3">
             <a:extLst>
               <a:ext uri="{FF2B5EF4-FFF2-40B4-BE49-F238E27FC236}">
-                <a16:creationId xmlns:a16="http://schemas.microsoft.com/office/drawing/2014/main" id="{6E6341B5-6E80-D17A-F2EF-B91CB0F736F8}"/>
+                <a16:creationId xmlns:a16="http://schemas.microsoft.com/office/drawing/2014/main" id="{91F94BC7-EEAB-81EA-8DB0-8CD5CDE65287}"/>
               </a:ext>
             </a:extLst>
           </p:cNvPr>
@@ -3451,7 +3451,7 @@
             </a:lvl1pPr>
           </a:lstStyle>
           <a:p>
-            <a:fld id="{38763FD9-025C-42FF-9801-ED3DF9955C4A}" type="datetimeFigureOut">
+            <a:fld id="{A6C33393-DBA6-43C4-B790-5CC6F34FDE5D}" type="datetimeFigureOut">
               <a:rPr kumimoji="1" lang="ja-JP" altLang="en-US" smtClean="0"/>
               <a:t>2026/9/20</a:t>
             </a:fld>
@@ -3464,7 +3464,7 @@
           <p:cNvPr id="5" name="フッター プレースホルダー 4">
             <a:extLst>
               <a:ext uri="{FF2B5EF4-FFF2-40B4-BE49-F238E27FC236}">
-                <a16:creationId xmlns:a16="http://schemas.microsoft.com/office/drawing/2014/main" id="{70FB5956-5EB1-B794-2487-A51A5EC1E1C3}"/>
+                <a16:creationId xmlns:a16="http://schemas.microsoft.com/office/drawing/2014/main" id="{E82030CC-F0BA-06C7-B6AB-0FF5ACEF3AB2}"/>
               </a:ext>
             </a:extLst>
           </p:cNvPr>
@@ -3507,7 +3507,7 @@
           <p:cNvPr id="6" name="スライド番号プレースホルダー 5">
             <a:extLst>
               <a:ext uri="{FF2B5EF4-FFF2-40B4-BE49-F238E27FC236}">
-                <a16:creationId xmlns:a16="http://schemas.microsoft.com/office/drawing/2014/main" id="{2296EC0F-7290-6081-9B32-B499CD607ED0}"/>
+                <a16:creationId xmlns:a16="http://schemas.microsoft.com/office/drawing/2014/main" id="{EC5EAABD-3C7B-2838-83C0-916A2378A427}"/>
               </a:ext>
             </a:extLst>
           </p:cNvPr>
@@ -3541,7 +3541,7 @@
             </a:lvl1pPr>
           </a:lstStyle>
           <a:p>
-            <a:fld id="{58209F0D-5D93-463D-95EF-1CFE68EC00F2}" type="slidenum">
+            <a:fld id="{627C57A2-8EA4-4717-8325-104568F77079}" type="slidenum">
               <a:rPr kumimoji="1" lang="ja-JP" altLang="en-US" smtClean="0"/>
               <a:t>‹#›</a:t>
             </a:fld>
@@ -3552,7 +3552,7 @@
     </p:spTree>
     <p:extLst>
       <p:ext uri="{BB962C8B-B14F-4D97-AF65-F5344CB8AC3E}">
-        <p14:creationId xmlns:p14="http://schemas.microsoft.com/office/powerpoint/2010/main" val="3295270065"/>
+        <p14:creationId xmlns:p14="http://schemas.microsoft.com/office/powerpoint/2010/main" val="263386050"/>
       </p:ext>
     </p:extLst>
   </p:cSld>
@@ -3876,7 +3876,7 @@
           <p:cNvPr id="2" name="タイトル 1">
             <a:extLst>
               <a:ext uri="{FF2B5EF4-FFF2-40B4-BE49-F238E27FC236}">
-                <a16:creationId xmlns:a16="http://schemas.microsoft.com/office/drawing/2014/main" id="{18C3E547-4F99-FBA1-04F8-32E1CE64BCCD}"/>
+                <a16:creationId xmlns:a16="http://schemas.microsoft.com/office/drawing/2014/main" id="{2C164441-2E00-5A63-BAD9-D3C3BFDFDCED}"/>
               </a:ext>
             </a:extLst>
           </p:cNvPr>
@@ -3908,7 +3908,7 @@
           <p:cNvPr id="3" name="テキスト ボックス 2">
             <a:extLst>
               <a:ext uri="{FF2B5EF4-FFF2-40B4-BE49-F238E27FC236}">
-                <a16:creationId xmlns:a16="http://schemas.microsoft.com/office/drawing/2014/main" id="{BB53F96F-A16E-4D52-363A-0B869B5468E9}"/>
+                <a16:creationId xmlns:a16="http://schemas.microsoft.com/office/drawing/2014/main" id="{2D8770D3-EFCB-BEE0-0EE0-B8A108B3D57A}"/>
               </a:ext>
             </a:extLst>
           </p:cNvPr>
@@ -3947,7 +3947,7 @@
           <p:cNvPr id="4" name="正方形/長方形 3" descr="TC21 代替テキスト">
             <a:extLst>
               <a:ext uri="{FF2B5EF4-FFF2-40B4-BE49-F238E27FC236}">
-                <a16:creationId xmlns:a16="http://schemas.microsoft.com/office/drawing/2014/main" id="{90F20FCE-F7A6-E20E-06E2-69175C235DC8}"/>
+                <a16:creationId xmlns:a16="http://schemas.microsoft.com/office/drawing/2014/main" id="{86D91A0C-31CA-6787-4414-2DC6A54F0C68}"/>
               </a:ext>
             </a:extLst>
           </p:cNvPr>
@@ -4000,7 +4000,7 @@
           <p:cNvPr id="7" name="グループ化 6">
             <a:extLst>
               <a:ext uri="{FF2B5EF4-FFF2-40B4-BE49-F238E27FC236}">
-                <a16:creationId xmlns:a16="http://schemas.microsoft.com/office/drawing/2014/main" id="{3EF8C590-F955-B01E-6F7D-830C7528F9B1}"/>
+                <a16:creationId xmlns:a16="http://schemas.microsoft.com/office/drawing/2014/main" id="{D54072BA-3B4E-30B2-E592-C8CE8F3E0745}"/>
               </a:ext>
             </a:extLst>
           </p:cNvPr>
@@ -4020,7 +4020,7 @@
             <p:cNvPr id="5" name="テキスト ボックス 4">
               <a:extLst>
                 <a:ext uri="{FF2B5EF4-FFF2-40B4-BE49-F238E27FC236}">
-                  <a16:creationId xmlns:a16="http://schemas.microsoft.com/office/drawing/2014/main" id="{479B69E9-5AFC-1AE2-3039-A1D05FD4B366}"/>
+                  <a16:creationId xmlns:a16="http://schemas.microsoft.com/office/drawing/2014/main" id="{34160EB2-EBE3-A74A-0C27-7C9A5E50906E}"/>
                 </a:ext>
               </a:extLst>
             </p:cNvPr>
@@ -4064,7 +4064,7 @@
             <p:cNvPr id="6" name="テキスト ボックス 5">
               <a:extLst>
                 <a:ext uri="{FF2B5EF4-FFF2-40B4-BE49-F238E27FC236}">
-                  <a16:creationId xmlns:a16="http://schemas.microsoft.com/office/drawing/2014/main" id="{86AD4446-9B0A-FE84-B102-BF3BADA8E927}"/>
+                  <a16:creationId xmlns:a16="http://schemas.microsoft.com/office/drawing/2014/main" id="{9F6D8629-FF01-720D-205F-CFF762C818A0}"/>
                 </a:ext>
               </a:extLst>
             </p:cNvPr>
@@ -4109,7 +4109,7 @@
           <p:cNvPr id="8" name="テキスト ボックス 7">
             <a:extLst>
               <a:ext uri="{FF2B5EF4-FFF2-40B4-BE49-F238E27FC236}">
-                <a16:creationId xmlns:a16="http://schemas.microsoft.com/office/drawing/2014/main" id="{77097DE4-FED2-BA9D-6720-8F3CEBD347CE}"/>
+                <a16:creationId xmlns:a16="http://schemas.microsoft.com/office/drawing/2014/main" id="{E95A1D7C-7AF3-9135-4CA4-3B99D254FECF}"/>
               </a:ext>
             </a:extLst>
           </p:cNvPr>
@@ -4146,7 +4146,7 @@
     </p:spTree>
     <p:extLst>
       <p:ext uri="{BB962C8B-B14F-4D97-AF65-F5344CB8AC3E}">
-        <p14:creationId xmlns:p14="http://schemas.microsoft.com/office/powerpoint/2010/main" val="1689427208"/>
+        <p14:creationId xmlns:p14="http://schemas.microsoft.com/office/powerpoint/2010/main" val="2672362076"/>
       </p:ext>
     </p:extLst>
   </p:cSld>
@@ -4178,7 +4178,7 @@
           <p:cNvPr id="2" name="タイトル 1">
             <a:extLst>
               <a:ext uri="{FF2B5EF4-FFF2-40B4-BE49-F238E27FC236}">
-                <a16:creationId xmlns:a16="http://schemas.microsoft.com/office/drawing/2014/main" id="{1F7EF472-310A-B422-2D30-E42D318AB4AB}"/>
+                <a16:creationId xmlns:a16="http://schemas.microsoft.com/office/drawing/2014/main" id="{6427A67E-2E7F-CCF0-2C52-1ABECEE51399}"/>
               </a:ext>
             </a:extLst>
           </p:cNvPr>
@@ -4210,7 +4210,7 @@
           <p:cNvPr id="3" name="表 2">
             <a:extLst>
               <a:ext uri="{FF2B5EF4-FFF2-40B4-BE49-F238E27FC236}">
-                <a16:creationId xmlns:a16="http://schemas.microsoft.com/office/drawing/2014/main" id="{AEE3AAAD-920C-0D06-0986-9FE4DDD5776F}"/>
+                <a16:creationId xmlns:a16="http://schemas.microsoft.com/office/drawing/2014/main" id="{12D35C98-2B26-7F05-10BA-CA49B37BF222}"/>
               </a:ext>
             </a:extLst>
           </p:cNvPr>
@@ -4220,7 +4220,7 @@
           <p:nvPr>
             <p:extLst>
               <p:ext uri="{D42A27DB-BD31-4B8C-83A1-F6EECF244321}">
-                <p14:modId xmlns:p14="http://schemas.microsoft.com/office/powerpoint/2010/main" val="580589936"/>
+                <p14:modId xmlns:p14="http://schemas.microsoft.com/office/powerpoint/2010/main" val="491690050"/>
               </p:ext>
             </p:extLst>
           </p:nvPr>
@@ -4239,21 +4239,21 @@
                 <a:gridCol w="2540000">
                   <a:extLst>
                     <a:ext uri="{9D8B030D-6E8A-4147-A177-3AD203B41FA5}">
-                      <a16:colId xmlns:a16="http://schemas.microsoft.com/office/drawing/2014/main" val="996914837"/>
+                      <a16:colId xmlns:a16="http://schemas.microsoft.com/office/drawing/2014/main" val="1789039758"/>
                     </a:ext>
                   </a:extLst>
                 </a:gridCol>
                 <a:gridCol w="2540000">
                   <a:extLst>
                     <a:ext uri="{9D8B030D-6E8A-4147-A177-3AD203B41FA5}">
-                      <a16:colId xmlns:a16="http://schemas.microsoft.com/office/drawing/2014/main" val="3742802460"/>
+                      <a16:colId xmlns:a16="http://schemas.microsoft.com/office/drawing/2014/main" val="3184538429"/>
                     </a:ext>
                   </a:extLst>
                 </a:gridCol>
                 <a:gridCol w="2540000">
                   <a:extLst>
                     <a:ext uri="{9D8B030D-6E8A-4147-A177-3AD203B41FA5}">
-                      <a16:colId xmlns:a16="http://schemas.microsoft.com/office/drawing/2014/main" val="660587147"/>
+                      <a16:colId xmlns:a16="http://schemas.microsoft.com/office/drawing/2014/main" val="3691481348"/>
                     </a:ext>
                   </a:extLst>
                 </a:gridCol>
@@ -4301,7 +4301,7 @@
                 </a:tc>
                 <a:extLst>
                   <a:ext uri="{0D108BD9-81ED-4DB2-BD59-A6C34878D82A}">
-                    <a16:rowId xmlns:a16="http://schemas.microsoft.com/office/drawing/2014/main" val="2023520076"/>
+                    <a16:rowId xmlns:a16="http://schemas.microsoft.com/office/drawing/2014/main" val="3852656383"/>
                   </a:ext>
                 </a:extLst>
               </a:tr>
@@ -4363,7 +4363,7 @@
                 </a:tc>
                 <a:extLst>
                   <a:ext uri="{0D108BD9-81ED-4DB2-BD59-A6C34878D82A}">
-                    <a16:rowId xmlns:a16="http://schemas.microsoft.com/office/drawing/2014/main" val="2804865842"/>
+                    <a16:rowId xmlns:a16="http://schemas.microsoft.com/office/drawing/2014/main" val="3738879534"/>
                   </a:ext>
                 </a:extLst>
               </a:tr>
@@ -4407,7 +4407,7 @@
                 </a:tc>
                 <a:extLst>
                   <a:ext uri="{0D108BD9-81ED-4DB2-BD59-A6C34878D82A}">
-                    <a16:rowId xmlns:a16="http://schemas.microsoft.com/office/drawing/2014/main" val="2824146343"/>
+                    <a16:rowId xmlns:a16="http://schemas.microsoft.com/office/drawing/2014/main" val="1485096844"/>
                   </a:ext>
                 </a:extLst>
               </a:tr>
@@ -4418,7 +4418,7 @@
     </p:spTree>
     <p:extLst>
       <p:ext uri="{BB962C8B-B14F-4D97-AF65-F5344CB8AC3E}">
-        <p14:creationId xmlns:p14="http://schemas.microsoft.com/office/powerpoint/2010/main" val="327097240"/>
+        <p14:creationId xmlns:p14="http://schemas.microsoft.com/office/powerpoint/2010/main" val="4034791798"/>
       </p:ext>
     </p:extLst>
   </p:cSld>
@@ -4450,7 +4450,7 @@
           <p:cNvPr id="2" name="タイトル 1">
             <a:extLst>
               <a:ext uri="{FF2B5EF4-FFF2-40B4-BE49-F238E27FC236}">
-                <a16:creationId xmlns:a16="http://schemas.microsoft.com/office/drawing/2014/main" id="{AA29310C-D63E-5960-D017-7D99C9077F36}"/>
+                <a16:creationId xmlns:a16="http://schemas.microsoft.com/office/drawing/2014/main" id="{AB38B094-5A30-1E21-B363-8E3D39916956}"/>
               </a:ext>
             </a:extLst>
           </p:cNvPr>
@@ -4482,7 +4482,7 @@
           <p:cNvPr id="3" name="テキスト ボックス 2">
             <a:extLst>
               <a:ext uri="{FF2B5EF4-FFF2-40B4-BE49-F238E27FC236}">
-                <a16:creationId xmlns:a16="http://schemas.microsoft.com/office/drawing/2014/main" id="{C52A106E-79D0-BFAE-1024-07C4FA4120D5}"/>
+                <a16:creationId xmlns:a16="http://schemas.microsoft.com/office/drawing/2014/main" id="{22CA5BDC-A8F0-3AEE-41D7-E22EDD1032C7}"/>
               </a:ext>
             </a:extLst>
           </p:cNvPr>
@@ -4526,7 +4526,7 @@
           <p:cNvPr id="4" name="フッター プレースホルダー 3">
             <a:extLst>
               <a:ext uri="{FF2B5EF4-FFF2-40B4-BE49-F238E27FC236}">
-                <a16:creationId xmlns:a16="http://schemas.microsoft.com/office/drawing/2014/main" id="{C5D4D8B9-8AEB-4038-50B1-697C71A2B833}"/>
+                <a16:creationId xmlns:a16="http://schemas.microsoft.com/office/drawing/2014/main" id="{9FC72E92-BDA1-905B-37E7-6832577CE4EB}"/>
               </a:ext>
             </a:extLst>
           </p:cNvPr>
@@ -4556,7 +4556,7 @@
     </p:spTree>
     <p:extLst>
       <p:ext uri="{BB962C8B-B14F-4D97-AF65-F5344CB8AC3E}">
-        <p14:creationId xmlns:p14="http://schemas.microsoft.com/office/powerpoint/2010/main" val="2079485624"/>
+        <p14:creationId xmlns:p14="http://schemas.microsoft.com/office/powerpoint/2010/main" val="1818296070"/>
       </p:ext>
     </p:extLst>
   </p:cSld>
@@ -4593,7 +4593,7 @@
           <p:cNvPr id="2" name="タイトル 1">
             <a:extLst>
               <a:ext uri="{FF2B5EF4-FFF2-40B4-BE49-F238E27FC236}">
-                <a16:creationId xmlns:a16="http://schemas.microsoft.com/office/drawing/2014/main" id="{42C6FE56-FDFE-B635-4D83-D28A123598CA}"/>
+                <a16:creationId xmlns:a16="http://schemas.microsoft.com/office/drawing/2014/main" id="{3D0326AF-31AB-7362-3577-8DB8975B4829}"/>
               </a:ext>
             </a:extLst>
           </p:cNvPr>
@@ -4618,7 +4618,7 @@
           <p:cNvPr id="3" name="テキスト プレースホルダー 2">
             <a:extLst>
               <a:ext uri="{FF2B5EF4-FFF2-40B4-BE49-F238E27FC236}">
-                <a16:creationId xmlns:a16="http://schemas.microsoft.com/office/drawing/2014/main" id="{FCFFB0C6-A78E-A907-32EA-91BBC63963F6}"/>
+                <a16:creationId xmlns:a16="http://schemas.microsoft.com/office/drawing/2014/main" id="{A201569F-2023-53CA-EC5D-3452219A5F1B}"/>
               </a:ext>
             </a:extLst>
           </p:cNvPr>
@@ -4641,7 +4641,7 @@
     </p:spTree>
     <p:extLst>
       <p:ext uri="{BB962C8B-B14F-4D97-AF65-F5344CB8AC3E}">
-        <p14:creationId xmlns:p14="http://schemas.microsoft.com/office/powerpoint/2010/main" val="484782073"/>
+        <p14:creationId xmlns:p14="http://schemas.microsoft.com/office/powerpoint/2010/main" val="1068003550"/>
       </p:ext>
     </p:extLst>
   </p:cSld>
